--- a/lessons/lesson-10/slides.pptx
+++ b/lessons/lesson-10/slides.pptx
@@ -2,28 +2,28 @@
 <file path=ppt/presentation.xml><?xml version="1.0" encoding="utf-8"?>
 <p:presentation xmlns:p="http://schemas.openxmlformats.org/presentationml/2006/main">
   <p:sldMasterIdLst>
-    <p:sldMasterId xmlns:r="http://schemas.openxmlformats.org/officeDocument/2006/relationships" id="2147483648" r:id="R334312c63bd74241"/>
+    <p:sldMasterId xmlns:r="http://schemas.openxmlformats.org/officeDocument/2006/relationships" id="2147483648" r:id="R4510bafdcbf9419b"/>
   </p:sldMasterIdLst>
   <p:notesMasterIdLst>
-    <p:notesMasterId xmlns:r="http://schemas.openxmlformats.org/officeDocument/2006/relationships" r:id="R144e10ee7c8f45ac"/>
+    <p:notesMasterId xmlns:r="http://schemas.openxmlformats.org/officeDocument/2006/relationships" r:id="R2bb51092ea044c26"/>
   </p:notesMasterIdLst>
   <p:sldIdLst>
-    <p:sldId xmlns:r="http://schemas.openxmlformats.org/officeDocument/2006/relationships" id="256" r:id="R7df83243cbfd4101"/>
-    <p:sldId xmlns:r="http://schemas.openxmlformats.org/officeDocument/2006/relationships" id="257" r:id="R7a0f9b640d4a489f"/>
-    <p:sldId xmlns:r="http://schemas.openxmlformats.org/officeDocument/2006/relationships" id="258" r:id="Rbfd7d3f9b28a4f64"/>
-    <p:sldId xmlns:r="http://schemas.openxmlformats.org/officeDocument/2006/relationships" id="259" r:id="R584b3d71c837478e"/>
-    <p:sldId xmlns:r="http://schemas.openxmlformats.org/officeDocument/2006/relationships" id="260" r:id="Re84d1836221741b8"/>
-    <p:sldId xmlns:r="http://schemas.openxmlformats.org/officeDocument/2006/relationships" id="261" r:id="Rf66d83e4225c4a91"/>
-    <p:sldId xmlns:r="http://schemas.openxmlformats.org/officeDocument/2006/relationships" id="262" r:id="R6f3d1cbe07a44fbc"/>
-    <p:sldId xmlns:r="http://schemas.openxmlformats.org/officeDocument/2006/relationships" id="263" r:id="R01fe00d8ae4244f0"/>
-    <p:sldId xmlns:r="http://schemas.openxmlformats.org/officeDocument/2006/relationships" id="264" r:id="R04bbc4edf702451a"/>
-    <p:sldId xmlns:r="http://schemas.openxmlformats.org/officeDocument/2006/relationships" id="265" r:id="R05255117b8904ba8"/>
-    <p:sldId xmlns:r="http://schemas.openxmlformats.org/officeDocument/2006/relationships" id="266" r:id="Re697a3fa1af7483c"/>
-    <p:sldId xmlns:r="http://schemas.openxmlformats.org/officeDocument/2006/relationships" id="267" r:id="R1fdbc98bf3f84288"/>
-    <p:sldId xmlns:r="http://schemas.openxmlformats.org/officeDocument/2006/relationships" id="268" r:id="Rfac1f89f6f924617"/>
-    <p:sldId xmlns:r="http://schemas.openxmlformats.org/officeDocument/2006/relationships" id="269" r:id="R7025b1e65ffd4fd2"/>
-    <p:sldId xmlns:r="http://schemas.openxmlformats.org/officeDocument/2006/relationships" id="270" r:id="R6a78c89861a44b01"/>
-    <p:sldId xmlns:r="http://schemas.openxmlformats.org/officeDocument/2006/relationships" id="271" r:id="R375d5de11740489a"/>
+    <p:sldId xmlns:r="http://schemas.openxmlformats.org/officeDocument/2006/relationships" id="256" r:id="R9ff379020d50411c"/>
+    <p:sldId xmlns:r="http://schemas.openxmlformats.org/officeDocument/2006/relationships" id="257" r:id="R5d2c0aeed2ce441c"/>
+    <p:sldId xmlns:r="http://schemas.openxmlformats.org/officeDocument/2006/relationships" id="258" r:id="Rbc8cf2fc59d246ff"/>
+    <p:sldId xmlns:r="http://schemas.openxmlformats.org/officeDocument/2006/relationships" id="259" r:id="R6852dee674c44ba6"/>
+    <p:sldId xmlns:r="http://schemas.openxmlformats.org/officeDocument/2006/relationships" id="260" r:id="R41f098271962487b"/>
+    <p:sldId xmlns:r="http://schemas.openxmlformats.org/officeDocument/2006/relationships" id="261" r:id="R3a4a64ba51cb4948"/>
+    <p:sldId xmlns:r="http://schemas.openxmlformats.org/officeDocument/2006/relationships" id="262" r:id="Rce887806cf8f417d"/>
+    <p:sldId xmlns:r="http://schemas.openxmlformats.org/officeDocument/2006/relationships" id="263" r:id="R0041e3890f594771"/>
+    <p:sldId xmlns:r="http://schemas.openxmlformats.org/officeDocument/2006/relationships" id="264" r:id="Rb8445a8197274f5b"/>
+    <p:sldId xmlns:r="http://schemas.openxmlformats.org/officeDocument/2006/relationships" id="265" r:id="R81db0bc243194c88"/>
+    <p:sldId xmlns:r="http://schemas.openxmlformats.org/officeDocument/2006/relationships" id="266" r:id="Rc4f31243897c4892"/>
+    <p:sldId xmlns:r="http://schemas.openxmlformats.org/officeDocument/2006/relationships" id="267" r:id="Rbeec61b4a5314ea6"/>
+    <p:sldId xmlns:r="http://schemas.openxmlformats.org/officeDocument/2006/relationships" id="268" r:id="Rd7101322991a4f76"/>
+    <p:sldId xmlns:r="http://schemas.openxmlformats.org/officeDocument/2006/relationships" id="269" r:id="R3e66cb506d464c16"/>
+    <p:sldId xmlns:r="http://schemas.openxmlformats.org/officeDocument/2006/relationships" id="270" r:id="R127c270fa96b4a25"/>
+    <p:sldId xmlns:r="http://schemas.openxmlformats.org/officeDocument/2006/relationships" id="271" r:id="R6596309757a04f4e"/>
   </p:sldIdLst>
   <p:sldSz cx="12192000" cy="6858000"/>
   <p:notesSz cx="6858000" cy="9144000"/>
@@ -698,7 +698,7 @@
           <a:lstStyle xmlns:a="http://schemas.openxmlformats.org/drawingml/2006/main"/>
           <a:p xmlns:a="http://schemas.openxmlformats.org/drawingml/2006/main">
             <a:r>
-              <a:t>演示成功路径与越权处理。pytest 通过后仍要核验字段约束是否符合 H1、自由摘要路径是否未受影响。Agent 请求改 configs/ 时拒绝并写入 failure-log；成功 diff 与失败记录一起留存。</a:t>
+              <a:t>直接打开课次 assets/agent-task-example/ 中的 generate.diff、test-output.txt 与 failure-log.md。真实 unittest 运行输出为 2 tests OK。成功 diff 与失败记录一起留存。</a:t>
             </a:r>
           </a:p>
           <a:p xmlns:a="http://schemas.openxmlformats.org/drawingml/2006/main">
@@ -724,6 +724,21 @@
           <a:p xmlns:a="http://schemas.openxmlformats.org/drawingml/2006/main">
             <a:r>
               <a:t>- /Users/bright/Projects/courses/graduate/lessons/lesson-10/teaching-plan.md</a:t>
+            </a:r>
+          </a:p>
+          <a:p xmlns:a="http://schemas.openxmlformats.org/drawingml/2006/main">
+            <a:r>
+              <a:t>- /Users/bright/Projects/courses/graduate/lessons/lesson-10/assets/agent-task-example/generate.diff</a:t>
+            </a:r>
+          </a:p>
+          <a:p xmlns:a="http://schemas.openxmlformats.org/drawingml/2006/main">
+            <a:r>
+              <a:t>- /Users/bright/Projects/courses/graduate/lessons/lesson-10/assets/agent-task-example/test-output.txt</a:t>
+            </a:r>
+          </a:p>
+          <a:p xmlns:a="http://schemas.openxmlformats.org/drawingml/2006/main">
+            <a:r>
+              <a:t>- /Users/bright/Projects/courses/graduate/lessons/lesson-10/assets/agent-task-example/failure-log.md</a:t>
             </a:r>
           </a:p>
           <a:p xmlns:a="http://schemas.openxmlformats.org/drawingml/2006/main">
@@ -798,7 +813,7 @@
           <a:lstStyle xmlns:a="http://schemas.openxmlformats.org/drawingml/2006/main"/>
           <a:p xmlns:a="http://schemas.openxmlformats.org/drawingml/2006/main">
             <a:r>
-              <a:t>40:00–43:00 发布任务，随后切换 P14 停留。没有真实课题者可沿用贯穿案例，但必须改换子问题或问题表述。现场故障时改为 Markdown 或纸面完成契约与审查。</a:t>
+              <a:t>40:00–43:00 发布任务，随后切换 P14 停留。环境故障时直接审查 assets/agent-task-example/ 中的可核验工件，两条路径都完成同一套五步最小闭环。</a:t>
             </a:r>
           </a:p>
           <a:p xmlns:a="http://schemas.openxmlformats.org/drawingml/2006/main">
@@ -1979,7 +1994,7 @@
           <p:nvPr/>
         </p:nvPicPr>
         <p:blipFill>
-          <a:blip xmlns:r="http://schemas.openxmlformats.org/officeDocument/2006/relationships" xmlns:a="http://schemas.openxmlformats.org/drawingml/2006/main" r:embed="Ra042e969c67a43d8">
+          <a:blip xmlns:r="http://schemas.openxmlformats.org/officeDocument/2006/relationships" xmlns:a="http://schemas.openxmlformats.org/drawingml/2006/main" r:embed="Rc1ce783da2e044fe">
             <a:duotone>
               <a:prstClr val="black"/>
               <a:schemeClr val="accent1">
@@ -2157,7 +2172,7 @@
           <p:nvPr/>
         </p:nvPicPr>
         <p:blipFill rotWithShape="1">
-          <a:blip xmlns:r="http://schemas.openxmlformats.org/officeDocument/2006/relationships" xmlns:a="http://schemas.openxmlformats.org/drawingml/2006/main" r:embed="Re2f15e5c01854059"/>
+          <a:blip xmlns:r="http://schemas.openxmlformats.org/officeDocument/2006/relationships" xmlns:a="http://schemas.openxmlformats.org/drawingml/2006/main" r:embed="R876595c3652c4209"/>
           <a:srcRect xmlns:a="http://schemas.openxmlformats.org/drawingml/2006/main" l="74359" t="0" r="1346" b="0"/>
           <a:stretch xmlns:a="http://schemas.openxmlformats.org/drawingml/2006/main"/>
         </p:blipFill>
@@ -2180,7 +2195,7 @@
           <p:nvPr/>
         </p:nvPicPr>
         <p:blipFill rotWithShape="1">
-          <a:blip xmlns:r="http://schemas.openxmlformats.org/officeDocument/2006/relationships" xmlns:a="http://schemas.openxmlformats.org/drawingml/2006/main" r:embed="R29540d326a9141e4">
+          <a:blip xmlns:r="http://schemas.openxmlformats.org/officeDocument/2006/relationships" xmlns:a="http://schemas.openxmlformats.org/drawingml/2006/main" r:embed="R45768752fe0546f7">
             <a:alphaModFix amt="35000"/>
           </a:blip>
           <a:srcRect xmlns:a="http://schemas.openxmlformats.org/drawingml/2006/main" l="0" t="9831" r="0" b="36385"/>
@@ -2442,7 +2457,7 @@
           <p:nvPr/>
         </p:nvPicPr>
         <p:blipFill>
-          <a:blip xmlns:r="http://schemas.openxmlformats.org/officeDocument/2006/relationships" xmlns:a="http://schemas.openxmlformats.org/drawingml/2006/main" r:embed="R3795efdbf0ca4299"/>
+          <a:blip xmlns:r="http://schemas.openxmlformats.org/officeDocument/2006/relationships" xmlns:a="http://schemas.openxmlformats.org/drawingml/2006/main" r:embed="R3af289aac5ff4cf9"/>
           <a:srcRect xmlns:a="http://schemas.openxmlformats.org/drawingml/2006/main" l="0" t="0" r="54251" b="0"/>
           <a:stretch xmlns:a="http://schemas.openxmlformats.org/drawingml/2006/main"/>
         </p:blipFill>
@@ -2699,7 +2714,7 @@
           <p:nvPr/>
         </p:nvPicPr>
         <p:blipFill rotWithShape="1">
-          <a:blip xmlns:r="http://schemas.openxmlformats.org/officeDocument/2006/relationships" xmlns:a="http://schemas.openxmlformats.org/drawingml/2006/main" r:embed="Rb9c9a3301d374591"/>
+          <a:blip xmlns:r="http://schemas.openxmlformats.org/officeDocument/2006/relationships" xmlns:a="http://schemas.openxmlformats.org/drawingml/2006/main" r:embed="R9aed825c1e9240ae"/>
           <a:srcRect xmlns:a="http://schemas.openxmlformats.org/drawingml/2006/main" l="0" t="0" r="1346" b="0"/>
           <a:stretch xmlns:a="http://schemas.openxmlformats.org/drawingml/2006/main"/>
         </p:blipFill>
@@ -2882,7 +2897,7 @@
           <p:nvPr/>
         </p:nvPicPr>
         <p:blipFill>
-          <a:blip xmlns:r="http://schemas.openxmlformats.org/officeDocument/2006/relationships" xmlns:a="http://schemas.openxmlformats.org/drawingml/2006/main" r:embed="R59b4e18684d84550"/>
+          <a:blip xmlns:r="http://schemas.openxmlformats.org/officeDocument/2006/relationships" xmlns:a="http://schemas.openxmlformats.org/drawingml/2006/main" r:embed="R9731871e37da4b06"/>
           <a:stretch xmlns:a="http://schemas.openxmlformats.org/drawingml/2006/main">
             <a:fillRect l="0" t="0" r="0" b="0"/>
           </a:stretch>
@@ -2978,7 +2993,7 @@
           <p:nvPr/>
         </p:nvPicPr>
         <p:blipFill>
-          <a:blip xmlns:r="http://schemas.openxmlformats.org/officeDocument/2006/relationships" xmlns:a="http://schemas.openxmlformats.org/drawingml/2006/main" r:embed="R7c701b7d35504670">
+          <a:blip xmlns:r="http://schemas.openxmlformats.org/officeDocument/2006/relationships" xmlns:a="http://schemas.openxmlformats.org/drawingml/2006/main" r:embed="R94f1d60311e54f79">
             <a:duotone>
               <a:prstClr val="black"/>
               <a:schemeClr val="accent1">
@@ -3145,7 +3160,7 @@
           <p:nvPr/>
         </p:nvPicPr>
         <p:blipFill rotWithShape="1">
-          <a:blip xmlns:r="http://schemas.openxmlformats.org/officeDocument/2006/relationships" xmlns:a="http://schemas.openxmlformats.org/drawingml/2006/main" r:embed="R0d95ddb618b94f32">
+          <a:blip xmlns:r="http://schemas.openxmlformats.org/officeDocument/2006/relationships" xmlns:a="http://schemas.openxmlformats.org/drawingml/2006/main" r:embed="R430bd8bdc3ff4273">
             <a:alphaModFix amt="20000"/>
             <a:duotone>
               <a:schemeClr val="accent4">
@@ -3243,10 +3258,10 @@
   </p:cSld>
   <p:clrMap bg1="lt1" tx1="dk1" bg2="lt2" tx2="dk2" accent1="accent1" accent2="accent2" accent3="accent3" accent4="accent4" accent5="accent5" accent6="accent6" hlink="hlink" folHlink="folHlink"/>
   <p:sldLayoutIdLst>
-    <p:sldLayoutId xmlns:r="http://schemas.openxmlformats.org/officeDocument/2006/relationships" id="2147483649" r:id="Rbcff91c55f304476"/>
-    <p:sldLayoutId xmlns:r="http://schemas.openxmlformats.org/officeDocument/2006/relationships" id="2147483650" r:id="R306889bd62d14992"/>
-    <p:sldLayoutId xmlns:r="http://schemas.openxmlformats.org/officeDocument/2006/relationships" id="2147483651" r:id="R4eacf8599cea4985"/>
-    <p:sldLayoutId xmlns:r="http://schemas.openxmlformats.org/officeDocument/2006/relationships" id="2147483652" r:id="Rf421c56d733942f9"/>
+    <p:sldLayoutId xmlns:r="http://schemas.openxmlformats.org/officeDocument/2006/relationships" id="2147483649" r:id="Rdea0407b81f54fa2"/>
+    <p:sldLayoutId xmlns:r="http://schemas.openxmlformats.org/officeDocument/2006/relationships" id="2147483650" r:id="Rcab429942206426f"/>
+    <p:sldLayoutId xmlns:r="http://schemas.openxmlformats.org/officeDocument/2006/relationships" id="2147483651" r:id="R2ee599990e86415d"/>
+    <p:sldLayoutId xmlns:r="http://schemas.openxmlformats.org/officeDocument/2006/relationships" id="2147483652" r:id="Rb15892e6f12e487f"/>
   </p:sldLayoutIdLst>
   <p:hf hdr="0" ftr="0" dt="0"/>
   <p:txStyles>
@@ -6510,7 +6525,7 @@
                 <a:ea typeface="Microsoft YaHei"/>
                 <a:cs typeface="Microsoft YaHei"/>
               </a:rPr>
-              <a:t>教学案例｜成功 diff 与越权请求一起留存</a:t>
+              <a:t>可核验课次工件｜diff + unittest + failure-log</a:t>
             </a:r>
           </a:p>
         </p:txBody>
@@ -6976,7 +6991,7 @@
                 <a:ea typeface="Microsoft YaHei"/>
                 <a:cs typeface="Microsoft YaHei"/>
               </a:rPr>
-              <a:t>pytest</a:t>
+              <a:t>unittest</a:t>
             </a:r>
           </a:p>
         </p:txBody>
@@ -7494,7 +7509,7 @@
                 <a:ea typeface="Microsoft YaHei"/>
                 <a:cs typeface="Microsoft YaHei"/>
               </a:rPr>
-              <a:t>范围合规；pytest 通过</a:t>
+              <a:t>范围合规；2 tests OK</a:t>
             </a:r>
           </a:p>
         </p:txBody>
@@ -8123,7 +8138,7 @@
                 <a:ea typeface="Microsoft YaHei"/>
                 <a:cs typeface="Microsoft YaHei"/>
               </a:rPr>
-              <a:t>个人实践 7 步</a:t>
+              <a:t>个人实践 5 步</a:t>
             </a:r>
           </a:p>
         </p:txBody>
@@ -8465,7 +8480,7 @@
                 <a:ea typeface="Microsoft YaHei"/>
                 <a:cs typeface="Microsoft YaHei"/>
               </a:rPr>
-              <a:t>受限执行 / 纸面推演</a:t>
+              <a:t>审查真实 / 预置 diff</a:t>
             </a:r>
           </a:p>
         </p:txBody>
@@ -8579,7 +8594,7 @@
                 <a:ea typeface="Microsoft YaHei"/>
                 <a:cs typeface="Microsoft YaHei"/>
               </a:rPr>
-              <a:t>diff 六项审查</a:t>
+              <a:t>验证证据 + 失败决策</a:t>
             </a:r>
           </a:p>
         </p:txBody>
@@ -8693,7 +8708,7 @@
                 <a:ea typeface="Microsoft YaHei"/>
                 <a:cs typeface="Microsoft YaHei"/>
               </a:rPr>
-              <a:t>运行测试并记录</a:t>
+              <a:t>开始 AI 披露记录</a:t>
             </a:r>
           </a:p>
         </p:txBody>
@@ -8751,7 +8766,7 @@
                 <a:ea typeface="Microsoft YaHei"/>
                 <a:cs typeface="Microsoft YaHei"/>
               </a:rPr>
-              <a:t>6</a:t>
+              <a:t>·</a:t>
             </a:r>
           </a:p>
         </p:txBody>
@@ -8807,7 +8822,7 @@
                 <a:ea typeface="Microsoft YaHei"/>
                 <a:cs typeface="Microsoft YaHei"/>
               </a:rPr>
-              <a:t>写一条失败记录</a:t>
+              <a:t>环境就绪：可真实执行</a:t>
             </a:r>
           </a:p>
         </p:txBody>
@@ -8865,7 +8880,7 @@
                 <a:ea typeface="Microsoft YaHei"/>
                 <a:cs typeface="Microsoft YaHei"/>
               </a:rPr>
-              <a:t>7</a:t>
+              <a:t>·</a:t>
             </a:r>
           </a:p>
         </p:txBody>
@@ -8921,7 +8936,7 @@
                 <a:ea typeface="Microsoft YaHei"/>
                 <a:cs typeface="Microsoft YaHei"/>
               </a:rPr>
-              <a:t>补 AI 使用记录</a:t>
+              <a:t>环境故障：用预置工件</a:t>
             </a:r>
           </a:p>
         </p:txBody>
@@ -9149,7 +9164,7 @@
                 <a:ea typeface="Microsoft YaHei"/>
                 <a:cs typeface="Microsoft YaHei"/>
               </a:rPr>
-              <a:t>执行可课后补</a:t>
+              <a:t>两路径产出相同</a:t>
             </a:r>
           </a:p>
         </p:txBody>
@@ -9804,7 +9819,7 @@
                 <a:ea typeface="Microsoft YaHei"/>
                 <a:cs typeface="Microsoft YaHei"/>
               </a:rPr>
-              <a:t>是否有测试与人工核验？</a:t>
+              <a:t>是否有验证证据与人工核验？</a:t>
             </a:r>
           </a:p>
         </p:txBody>
@@ -10112,7 +10127,7 @@
               </a:defRPr>
             </a:pPr>
             <a:r>
-              <a:rPr sz="1275" b="1">
+              <a:rPr sz="1350" b="1">
                 <a:solidFill>
                   <a:srgbClr val="C8161E"/>
                 </a:solidFill>
@@ -11068,7 +11083,7 @@
               </a:defRPr>
             </a:pPr>
             <a:r>
-              <a:rPr sz="1575" b="1">
+              <a:rPr sz="1350" b="1">
                 <a:solidFill>
                   <a:srgbClr val="18354E"/>
                 </a:solidFill>
@@ -11092,7 +11107,7 @@
               </a:defRPr>
             </a:pPr>
             <a:r>
-              <a:rPr sz="1575" b="1">
+              <a:rPr sz="1350" b="1">
                 <a:solidFill>
                   <a:srgbClr val="18354E"/>
                 </a:solidFill>
@@ -11100,7 +11115,7 @@
                 <a:ea typeface="Microsoft YaHei"/>
                 <a:cs typeface="Microsoft YaHei"/>
               </a:rPr>
-              <a:t>generate.py 的 diff</a:t>
+              <a:t>agent-traces/generate.diff</a:t>
             </a:r>
           </a:p>
           <a:p xmlns:a="http://schemas.openxmlformats.org/drawingml/2006/main">
@@ -11116,7 +11131,7 @@
               </a:defRPr>
             </a:pPr>
             <a:r>
-              <a:rPr sz="1575" b="1">
+              <a:rPr sz="1350" b="1">
                 <a:solidFill>
                   <a:srgbClr val="18354E"/>
                 </a:solidFill>
@@ -11124,7 +11139,7 @@
                 <a:ea typeface="Microsoft YaHei"/>
                 <a:cs typeface="Microsoft YaHei"/>
               </a:rPr>
-              <a:t>pytest 输出</a:t>
+              <a:t>agent-traces/test-output.txt</a:t>
             </a:r>
           </a:p>
           <a:p xmlns:a="http://schemas.openxmlformats.org/drawingml/2006/main">
@@ -11140,7 +11155,7 @@
               </a:defRPr>
             </a:pPr>
             <a:r>
-              <a:rPr sz="1575" b="1">
+              <a:rPr sz="1350" b="1">
                 <a:solidFill>
                   <a:srgbClr val="18354E"/>
                 </a:solidFill>
@@ -11164,7 +11179,7 @@
               </a:defRPr>
             </a:pPr>
             <a:r>
-              <a:rPr sz="1575" b="1">
+              <a:rPr sz="1350" b="1">
                 <a:solidFill>
                   <a:srgbClr val="18354E"/>
                 </a:solidFill>
@@ -11188,7 +11203,7 @@
               </a:defRPr>
             </a:pPr>
             <a:r>
-              <a:rPr sz="1575" b="1">
+              <a:rPr sz="1350" b="1">
                 <a:solidFill>
                   <a:srgbClr val="18354E"/>
                 </a:solidFill>
@@ -11196,7 +11211,7 @@
                 <a:ea typeface="Microsoft YaHei"/>
                 <a:cs typeface="Microsoft YaHei"/>
               </a:rPr>
-              <a:t>ai-usage-log.md +1</a:t>
+              <a:t>ai-usage-log.md 开头</a:t>
             </a:r>
           </a:p>
         </p:txBody>
@@ -11255,7 +11270,7 @@
                 <a:ea typeface="Microsoft YaHei"/>
                 <a:cs typeface="Microsoft YaHei"/>
               </a:rPr>
-              <a:t>现场故障：纸面 / Markdown 完成契约与审查；Agent 执行可课后补。</a:t>
+              <a:t>现场故障：审查课次预置 diff / unittest / failure-log。</a:t>
             </a:r>
           </a:p>
         </p:txBody>
@@ -15909,7 +15924,7 @@
               </a:defRPr>
             </a:pPr>
             <a:r>
-              <a:rPr sz="1425" b="1">
+              <a:rPr sz="1350" b="1">
                 <a:solidFill>
                   <a:srgbClr val="263746"/>
                 </a:solidFill>
@@ -16023,7 +16038,7 @@
               </a:defRPr>
             </a:pPr>
             <a:r>
-              <a:rPr sz="1425" b="1">
+              <a:rPr sz="1350" b="1">
                 <a:solidFill>
                   <a:srgbClr val="263746"/>
                 </a:solidFill>
@@ -16137,7 +16152,7 @@
               </a:defRPr>
             </a:pPr>
             <a:r>
-              <a:rPr sz="1425" b="1">
+              <a:rPr sz="1350" b="1">
                 <a:solidFill>
                   <a:srgbClr val="263746"/>
                 </a:solidFill>
@@ -16251,7 +16266,7 @@
               </a:defRPr>
             </a:pPr>
             <a:r>
-              <a:rPr sz="1425" b="1">
+              <a:rPr sz="1350" b="1">
                 <a:solidFill>
                   <a:srgbClr val="263746"/>
                 </a:solidFill>
